--- a/project.pptx
+++ b/project.pptx
@@ -45,7 +45,7 @@
       <p:bold r:id="rId31"/>
     </p:embeddedFont>
     <p:embeddedFont>
-      <p:font typeface="Hanken Grotesk" charset="0"/>
+      <p:font typeface="Hanken Grotesk" pitchFamily="2" charset="0"/>
       <p:regular r:id="rId32"/>
       <p:bold r:id="rId33"/>
       <p:italic r:id="rId34"/>
@@ -28853,7 +28853,7 @@
         <p:spPr>
           <a:xfrm>
             <a:off x="1110335" y="1507311"/>
-            <a:ext cx="5738066" cy="1073796"/>
+            <a:ext cx="6348314" cy="1073796"/>
           </a:xfrm>
           <a:prstGeom prst="rect">
             <a:avLst/>
@@ -28876,7 +28876,7 @@
             </a:pPr>
             <a:r>
               <a:rPr lang="en" dirty="0"/>
-              <a:t>Project – I :  VocabFlash</a:t>
+              <a:t>Project – I :  VocabFlash App</a:t>
             </a:r>
             <a:endParaRPr dirty="0"/>
           </a:p>
@@ -39346,6 +39346,9 @@
           </a:p>
           <a:p>
             <a:pPr marL="0" lvl="0" indent="0" algn="l" rtl="0">
+              <a:lnSpc>
+                <a:spcPct val="150000"/>
+              </a:lnSpc>
               <a:spcBef>
                 <a:spcPts val="0"/>
               </a:spcBef>
